--- a/Lunes-15/S02_Lunes-15_2_Post_4-horas_9x16.pptx
+++ b/Lunes-15/S02_Lunes-15_2_Post_4-horas_9x16.pptx
@@ -3394,7 +3394,7 @@
                 </a:solidFill>
                 <a:latin typeface="Inter"/>
               </a:rPr>
-              <a:t>Pruébalo en notaly.com.ve</a:t>
+              <a:t>Conócenos en notaly.com.ve</a:t>
             </a:r>
           </a:p>
         </p:txBody>
